--- a/content/Lectures/Semester 1/Week 10 - Vehicle Routing Problem/5 Source Files/Vehicle Routing Problem.pptx
+++ b/content/Lectures/Semester 1/Week 10 - Vehicle Routing Problem/5 Source Files/Vehicle Routing Problem.pptx
@@ -4677,8 +4677,33 @@
                       <a:rPr lang="en-GB" b="0" i="1" smtClean="0">
                         <a:latin typeface="Cambria Math" panose="02040503050406030204" pitchFamily="18" charset="0"/>
                       </a:rPr>
-                      <m:t>=1</m:t>
+                      <m:t>=</m:t>
                     </m:r>
+                    <m:sSub>
+                      <m:sSubPr>
+                        <m:ctrlPr>
+                          <a:rPr lang="en-GB" b="0" i="1" smtClean="0">
+                            <a:latin typeface="Cambria Math" panose="02040503050406030204" pitchFamily="18" charset="0"/>
+                          </a:rPr>
+                        </m:ctrlPr>
+                      </m:sSubPr>
+                      <m:e>
+                        <m:r>
+                          <a:rPr lang="en-GB" b="0" i="1" smtClean="0">
+                            <a:latin typeface="Cambria Math" panose="02040503050406030204" pitchFamily="18" charset="0"/>
+                          </a:rPr>
+                          <m:t>𝑟</m:t>
+                        </m:r>
+                      </m:e>
+                      <m:sub>
+                        <m:r>
+                          <a:rPr lang="en-GB" b="0" i="1" smtClean="0">
+                            <a:latin typeface="Cambria Math" panose="02040503050406030204" pitchFamily="18" charset="0"/>
+                          </a:rPr>
+                          <m:t>𝑛</m:t>
+                        </m:r>
+                      </m:sub>
+                    </m:sSub>
                   </m:oMath>
                 </a14:m>
                 <a:r>
@@ -5079,7 +5104,7 @@
                             <a:rPr lang="en-GB" b="0" i="1" smtClean="0">
                               <a:latin typeface="Cambria Math" panose="02040503050406030204" pitchFamily="18" charset="0"/>
                             </a:rPr>
-                            <m:t>𝑗</m:t>
+                            <m:t>𝑖</m:t>
                           </m:r>
                         </m:sub>
                       </m:sSub>
@@ -5110,7 +5135,7 @@
                             <a:rPr lang="en-GB" b="0" i="1" smtClean="0">
                               <a:latin typeface="Cambria Math" panose="02040503050406030204" pitchFamily="18" charset="0"/>
                             </a:rPr>
-                            <m:t>𝑖</m:t>
+                            <m:t>𝑗</m:t>
                           </m:r>
                         </m:sub>
                       </m:sSub>
@@ -5390,7 +5415,7 @@
                             <a:rPr lang="en-GB" sz="1200" b="0" i="1" smtClean="0">
                               <a:latin typeface="Cambria Math" panose="02040503050406030204" pitchFamily="18" charset="0"/>
                             </a:rPr>
-                            <m:t>𝑗</m:t>
+                            <m:t>𝑖</m:t>
                           </m:r>
                         </m:sub>
                       </m:sSub>
@@ -5421,7 +5446,7 @@
                             <a:rPr lang="en-GB" sz="1200" b="0" i="1" smtClean="0">
                               <a:latin typeface="Cambria Math" panose="02040503050406030204" pitchFamily="18" charset="0"/>
                             </a:rPr>
-                            <m:t>𝑖</m:t>
+                            <m:t>𝑗</m:t>
                           </m:r>
                         </m:sub>
                       </m:sSub>
@@ -5517,7 +5542,7 @@
                 </a:pPr>
                 <a:r>
                   <a:rPr lang="en-GB" sz="1200" dirty="0"/>
-                  <a:t>There will be a sequence </a:t>
+                  <a:t>Along the tour (after city 1) there will be a sequence </a:t>
                 </a:r>
                 <a14:m>
                   <m:oMath xmlns:m="http://schemas.openxmlformats.org/officeDocument/2006/math">
@@ -5534,7 +5559,7 @@
                           <a:rPr lang="en-GB" sz="1200" b="0" i="1" smtClean="0">
                             <a:latin typeface="Cambria Math" panose="02040503050406030204" pitchFamily="18" charset="0"/>
                           </a:rPr>
-                          <m:t>1&lt;</m:t>
+                          <m:t/>
                         </m:r>
                         <m:r>
                           <a:rPr lang="en-GB" sz="1200" b="0" i="1" smtClean="0">
@@ -5775,7 +5800,7 @@
                       <a:rPr lang="en-GB" sz="1200" b="0" i="0" smtClean="0">
                         <a:latin typeface="Cambria Math" panose="02040503050406030204" pitchFamily="18" charset="0"/>
                       </a:rPr>
-                      <m:t>&lt;1.</m:t>
+                      <m:t>.</m:t>
                     </m:r>
                   </m:oMath>
                 </a14:m>
@@ -6922,6 +6947,12 @@
                       <m:jc m:val="centerGroup"/>
                     </m:oMathParaPr>
                     <m:oMath xmlns:m="http://schemas.openxmlformats.org/officeDocument/2006/math">
+                      <m:r>
+                        <a:rPr lang="en-GB" sz="1200" b="0" i="1" smtClean="0">
+                          <a:latin typeface="Cambria Math" panose="02040503050406030204" pitchFamily="18" charset="0"/>
+                        </a:rPr>
+                        <m:t>𝑀≥</m:t>
+                      </m:r>
                       <m:sSub>
                         <m:sSubPr>
                           <m:ctrlPr>
@@ -7032,13 +7063,7 @@
                         <a:rPr lang="en-GB" sz="1200" b="0" i="1" smtClean="0">
                           <a:latin typeface="Cambria Math" panose="02040503050406030204" pitchFamily="18" charset="0"/>
                         </a:rPr>
-                        <m:t>−1 ≤</m:t>
-                      </m:r>
-                      <m:r>
-                        <a:rPr lang="en-GB" sz="1200" b="0" i="1" smtClean="0">
-                          <a:latin typeface="Cambria Math" panose="02040503050406030204" pitchFamily="18" charset="0"/>
-                        </a:rPr>
-                        <m:t>𝑀</m:t>
+                        <m:t>−1</m:t>
                       </m:r>
                     </m:oMath>
                   </m:oMathPara>
@@ -10016,7 +10041,7 @@
                 </a:pPr>
                 <a:r>
                   <a:rPr lang="en-GB" dirty="0"/>
-                  <a:t>Therefore, we do require the start and end of the chain to be 1, i.e.  </a:t>
+                  <a:t>Therefore, we no longer need one single chain through all the cities, i.e.  </a:t>
                 </a:r>
                 <a14:m>
                   <m:oMath xmlns:m="http://schemas.openxmlformats.org/officeDocument/2006/math">
@@ -10024,7 +10049,7 @@
                       <a:rPr lang="en-GB" b="0" i="0" smtClean="0">
                         <a:latin typeface="Cambria Math" panose="02040503050406030204" pitchFamily="18" charset="0"/>
                       </a:rPr>
-                      <m:t>1&lt; </m:t>
+                      <m:t/>
                     </m:r>
                     <m:sSub>
                       <m:sSubPr>
@@ -10274,7 +10299,7 @@
                       <a:rPr lang="en-GB" b="0" i="1" smtClean="0">
                         <a:latin typeface="Cambria Math" panose="02040503050406030204" pitchFamily="18" charset="0"/>
                       </a:rPr>
-                      <m:t>&lt;1</m:t>
+                      <m:t/>
                     </m:r>
                   </m:oMath>
                 </a14:m>
@@ -10292,7 +10317,7 @@
                 </a:pPr>
                 <a:r>
                   <a:rPr lang="en-GB" dirty="0"/>
-                  <a:t>Instead, we are free to choose as many sub-chains and then choose the edge entering the start of the chain leaving the end of the chain to be location 1.</a:t>
+                  <a:t>Instead, we can build several chains and join both ends of each chain to location 1.</a:t>
                 </a:r>
               </a:p>
               <a:p>
@@ -12251,7 +12276,7 @@
             </a:pPr>
             <a:r>
               <a:rPr lang="en-GB" dirty="0"/>
-              <a:t>There is no demand for the delivery? This might be OK for the royal mail, but you can imagine a certain amount that needs to be shipped to a location.</a:t>
+              <a:t>There is no demand for the delivery? This might be OK for the Royal Mail, but you can imagine a certain amount that needs to be shipped to a location.</a:t>
             </a:r>
           </a:p>
           <a:p>
@@ -12266,7 +12291,7 @@
             </a:pPr>
             <a:r>
               <a:rPr lang="en-GB" dirty="0"/>
-              <a:t>Note even in the Royal Mail case and assuming it was a single uniform parcel, that’s still roughly the number of locations for delivery.</a:t>
+              <a:t>Even for the Royal Mail, if every delivery is one uniform parcel, the demand is roughly one parcel per location.</a:t>
             </a:r>
           </a:p>
           <a:p>
@@ -12296,7 +12321,7 @@
             </a:pPr>
             <a:r>
               <a:rPr lang="en-GB" dirty="0"/>
-              <a:t>The is no capacity for a vehicle (route).</a:t>
+              <a:t>There is no capacity for a vehicle (route).</a:t>
             </a:r>
           </a:p>
           <a:p>
@@ -12534,7 +12559,7 @@
                 </a:pPr>
                 <a:r>
                   <a:rPr lang="en-GB" dirty="0"/>
-                  <a:t>Each route is a subtour starting at the base depot. We will call this location 0.</a:t>
+                  <a:t>Each route is a subtour starting at the base depot. We will call this location 1.</a:t>
                 </a:r>
               </a:p>
               <a:p>
@@ -12551,7 +12576,7 @@
                       <a:rPr lang="en-GB" b="0" i="1" smtClean="0">
                         <a:latin typeface="Cambria Math" panose="02040503050406030204" pitchFamily="18" charset="0"/>
                       </a:rPr>
-                      <m:t>𝐾</m:t>
+                      <m:t>𝑚</m:t>
                     </m:r>
                     <m:r>
                       <a:rPr lang="en-GB" b="0" i="1" smtClean="0">
@@ -12571,7 +12596,7 @@
                       <a:rPr lang="en-GB" b="0" i="1" smtClean="0">
                         <a:latin typeface="Cambria Math" panose="02040503050406030204" pitchFamily="18" charset="0"/>
                       </a:rPr>
-                      <m:t>𝐾</m:t>
+                      <m:t>𝑚</m:t>
                     </m:r>
                   </m:oMath>
                 </a14:m>
@@ -12742,7 +12767,7 @@
                 </a:pPr>
                 <a:r>
                   <a:rPr lang="en-GB" b="0" dirty="0"/>
-                  <a:t>Relax the sub-tour constraint to be at most </a:t>
+                  <a:t>Relax the depot constraint: at most </a:t>
                 </a:r>
                 <a14:m>
                   <m:oMath xmlns:m="http://schemas.openxmlformats.org/officeDocument/2006/math">
@@ -12754,6 +12779,10 @@
                     </m:r>
                   </m:oMath>
                 </a14:m>
+                <a:r>
+                  <a:rPr lang="en-GB" b="0" dirty="0"/>
+                  <a:t> edges leave city 1</a:t>
+                </a:r>
                 <a:endParaRPr lang="en-GB" b="0" dirty="0"/>
               </a:p>
               <a:p>
@@ -14096,7 +14125,7 @@
             </a:pPr>
             <a:r>
               <a:rPr lang="en-GB" dirty="0"/>
-              <a:t>Therefore, most of the time this will be a single vehicle</a:t>
+              <a:t>Therefore, if the distances obey the triangle inequality, a single vehicle (the TSP tour) is always one of the best solutions</a:t>
             </a:r>
           </a:p>
         </p:txBody>
@@ -14205,7 +14234,7 @@
           <a:p>
             <a:r>
               <a:rPr lang="en-GB" dirty="0"/>
-              <a:t>This might be fine, but it is likely that a company would like to delivery things quickly.</a:t>
+              <a:t>This might be fine, but it is likely that a company would like to deliver things quickly.</a:t>
             </a:r>
           </a:p>
           <a:p>
@@ -14325,7 +14354,7 @@
                 </a14:m>
                 <a:r>
                   <a:rPr lang="en-GB" dirty="0"/>
-                  <a:t> – Set of customers</a:t>
+                  <a:t> – Set of locations (city 1 is the depot)</a:t>
                 </a:r>
               </a:p>
               <a:p>
@@ -14516,18 +14545,8 @@
                 </a14:m>
                 <a:r>
                   <a:rPr lang="en-GB" dirty="0"/>
-                  <a:t> - decision variable indicating whether vehicle </a:t>
+                  <a:t> - decision variable indicating whether a vehicle</a:t>
                 </a:r>
-                <a14:m>
-                  <m:oMath xmlns:m="http://schemas.openxmlformats.org/officeDocument/2006/math">
-                    <m:r>
-                      <a:rPr lang="en-GB" b="0" i="1" smtClean="0">
-                        <a:latin typeface="Cambria Math" panose="02040503050406030204" pitchFamily="18" charset="0"/>
-                      </a:rPr>
-                      <m:t>𝑘</m:t>
-                    </m:r>
-                  </m:oMath>
-                </a14:m>
                 <a:r>
                   <a:rPr lang="en-GB" dirty="0"/>
                   <a:t> travels from city </a:t>
@@ -15016,7 +15035,7 @@
                 </a:pPr>
                 <a:r>
                   <a:rPr lang="en-GB" dirty="0"/>
-                  <a:t>Not possible unless we allow </a:t>
+                  <a:t>Not possible if every customer has </a:t>
                 </a:r>
                 <a14:m>
                   <m:oMath xmlns:m="http://schemas.openxmlformats.org/officeDocument/2006/math">
@@ -15049,13 +15068,13 @@
                       <a:rPr lang="en-GB" b="0" i="1" smtClean="0">
                         <a:latin typeface="Cambria Math" panose="02040503050406030204" pitchFamily="18" charset="0"/>
                       </a:rPr>
-                      <m:t>&lt;0</m:t>
+                      <m:t>&gt;0</m:t>
                     </m:r>
                   </m:oMath>
                 </a14:m>
                 <a:r>
                   <a:rPr lang="en-GB" dirty="0"/>
-                  <a:t>, i.e. we are picking something up.</a:t>
+                  <a:t>. A subtour needs some demand ≤ 0: a pick-up or a stop with no demand.</a:t>
                 </a:r>
               </a:p>
             </p:txBody>
@@ -15478,7 +15497,7 @@
                 </a:pPr>
                 <a:r>
                   <a:rPr lang="en-GB" dirty="0"/>
-                  <a:t>Just to show you a case when it is needed here is a cooked up example.</a:t>
+                  <a:t>Just to show you a case when it is needed, here is a cooked-up example for the flow model, in which the demands of a group of customers add up to zero (only possible with pick-ups or zero demands).</a:t>
                 </a:r>
               </a:p>
             </p:txBody>
@@ -17267,7 +17286,7 @@
                 </a:pPr>
                 <a:r>
                   <a:rPr lang="en-GB" dirty="0"/>
-                  <a:t>Each route is a subtour starting at the base depot. We will call this location 0.</a:t>
+                  <a:t>Each route is a subtour starting at the base depot. We will call this location 1.</a:t>
                 </a:r>
               </a:p>
               <a:p>
@@ -17330,7 +17349,7 @@
                           <a:rPr lang="en-GB" b="0" i="1" smtClean="0">
                             <a:latin typeface="Cambria Math" panose="02040503050406030204" pitchFamily="18" charset="0"/>
                           </a:rPr>
-                          <m:t>𝑑</m:t>
+                          <m:t>𝑞</m:t>
                         </m:r>
                       </m:e>
                       <m:sub>
@@ -17524,7 +17543,7 @@
                 </a14:m>
                 <a:r>
                   <a:rPr lang="en-GB" dirty="0"/>
-                  <a:t> – Set of customers</a:t>
+                  <a:t> – Set of locations (city 1 is the depot)</a:t>
                 </a:r>
               </a:p>
               <a:p>
@@ -18374,10 +18393,18 @@
               <a:buNone/>
             </a:pPr>
             <a:r>
+              <a:rPr lang="en-GB" dirty="0"/>
+              <a:t>The demonstration notebook runs in your browser on the course site: Week 10, 2 Lecture Demos, </a:t>
+            </a:r>
+            <a:r>
               <a:rPr lang="en-GB" dirty="0">
                 <a:hlinkClick r:id="rId2"/>
               </a:rPr>
-              <a:t>https://colab.research.google.com/drive/1BLPImK2TcdCrTaTN2-N6b2z3QNdUXpMe?usp=sharing</a:t>
+              <a:t>1 TSP and VRP with Pyomo.ipynb</a:t>
+            </a:r>
+            <a:r>
+              <a:rPr lang="en-GB" dirty="0"/>
+              <a:t>.</a:t>
             </a:r>
             <a:endParaRPr lang="en-GB" dirty="0"/>
           </a:p>
@@ -19414,7 +19441,7 @@
                 </a14:m>
                 <a:r>
                   <a:rPr lang="en-GB" dirty="0"/>
-                  <a:t> does not represent position! </a:t>
+                  <a:t> need not equal the position: only the order of the values matters. </a:t>
                 </a:r>
               </a:p>
               <a:p>
@@ -19597,7 +19624,7 @@
                           <a:rPr lang="en-GB" b="0" i="1" smtClean="0">
                             <a:latin typeface="Cambria Math" panose="02040503050406030204" pitchFamily="18" charset="0"/>
                           </a:rPr>
-                          <m:t>𝑗</m:t>
+                          <m:t>𝑘</m:t>
                         </m:r>
                       </m:sub>
                     </m:sSub>
@@ -19605,7 +19632,7 @@
                 </a14:m>
                 <a:r>
                   <a:rPr lang="en-GB" dirty="0"/>
-                  <a:t> is the order in which city </a:t>
+                  <a:t> is the city visited </a:t>
                 </a:r>
                 <a14:m>
                   <m:oMath xmlns:m="http://schemas.openxmlformats.org/officeDocument/2006/math">
@@ -19613,13 +19640,13 @@
                       <a:rPr lang="en-GB" b="0" i="1" smtClean="0">
                         <a:latin typeface="Cambria Math" panose="02040503050406030204" pitchFamily="18" charset="0"/>
                       </a:rPr>
-                      <m:t>𝑗</m:t>
+                      <m:t>𝑘</m:t>
                     </m:r>
                   </m:oMath>
                 </a14:m>
                 <a:r>
                   <a:rPr lang="en-GB" dirty="0"/>
-                  <a:t> is visited. i.e. </a:t>
+                  <a:t>-th, i.e. </a:t>
                 </a:r>
                 <a14:m>
                   <m:oMath xmlns:m="http://schemas.openxmlformats.org/officeDocument/2006/math">
@@ -20327,7 +20354,7 @@
                           <a:rPr lang="en-GB" b="0" i="1" smtClean="0">
                             <a:latin typeface="Cambria Math" panose="02040503050406030204" pitchFamily="18" charset="0"/>
                           </a:rPr>
-                          <m:t>𝑗</m:t>
+                          <m:t>𝑖</m:t>
                         </m:r>
                       </m:sub>
                     </m:sSub>
@@ -20497,7 +20524,7 @@
                             <a:rPr lang="en-GB" b="0" i="1" smtClean="0">
                               <a:latin typeface="Cambria Math" panose="02040503050406030204" pitchFamily="18" charset="0"/>
                             </a:rPr>
-                            <m:t>𝑗</m:t>
+                            <m:t>𝑖</m:t>
                           </m:r>
                         </m:sub>
                       </m:sSub>
@@ -20528,7 +20555,7 @@
                             <a:rPr lang="en-GB" b="0" i="1" smtClean="0">
                               <a:latin typeface="Cambria Math" panose="02040503050406030204" pitchFamily="18" charset="0"/>
                             </a:rPr>
-                            <m:t>𝑖</m:t>
+                            <m:t>𝑗</m:t>
                           </m:r>
                         </m:sub>
                       </m:sSub>
@@ -20705,7 +20732,7 @@
                             <a:rPr lang="en-GB" b="0" i="1" smtClean="0">
                               <a:latin typeface="Cambria Math" panose="02040503050406030204" pitchFamily="18" charset="0"/>
                             </a:rPr>
-                            <m:t>𝑗</m:t>
+                            <m:t>𝑖</m:t>
                           </m:r>
                         </m:sub>
                       </m:sSub>
@@ -20736,7 +20763,7 @@
                             <a:rPr lang="en-GB" b="0" i="1" smtClean="0">
                               <a:latin typeface="Cambria Math" panose="02040503050406030204" pitchFamily="18" charset="0"/>
                             </a:rPr>
-                            <m:t>𝑖</m:t>
+                            <m:t>𝑗</m:t>
                           </m:r>
                         </m:sub>
                       </m:sSub>
@@ -20788,7 +20815,7 @@
                           <a:rPr lang="en-GB" b="0" i="1" smtClean="0">
                             <a:latin typeface="Cambria Math" panose="02040503050406030204" pitchFamily="18" charset="0"/>
                           </a:rPr>
-                          <m:t>𝑗</m:t>
+                          <m:t>𝑖</m:t>
                         </m:r>
                       </m:sub>
                     </m:sSub>
@@ -20819,7 +20846,7 @@
                           <a:rPr lang="en-GB" b="0" i="1" smtClean="0">
                             <a:latin typeface="Cambria Math" panose="02040503050406030204" pitchFamily="18" charset="0"/>
                           </a:rPr>
-                          <m:t>𝑖</m:t>
+                          <m:t>𝑗</m:t>
                         </m:r>
                       </m:sub>
                     </m:sSub>
@@ -20939,7 +20966,7 @@
                             <a:rPr lang="en-GB" b="0" i="1" smtClean="0">
                               <a:latin typeface="Cambria Math" panose="02040503050406030204" pitchFamily="18" charset="0"/>
                             </a:rPr>
-                            <m:t>𝑗</m:t>
+                            <m:t>𝑖</m:t>
                           </m:r>
                         </m:sub>
                       </m:sSub>
@@ -20970,7 +20997,7 @@
                             <a:rPr lang="en-GB" b="0" i="1" smtClean="0">
                               <a:latin typeface="Cambria Math" panose="02040503050406030204" pitchFamily="18" charset="0"/>
                             </a:rPr>
-                            <m:t>𝑖</m:t>
+                            <m:t>𝑗</m:t>
                           </m:r>
                         </m:sub>
                       </m:sSub>
@@ -21011,7 +21038,7 @@
                               <a:latin typeface="Cambria Math" panose="02040503050406030204" pitchFamily="18" charset="0"/>
                               <a:ea typeface="Cambria Math" panose="02040503050406030204" pitchFamily="18" charset="0"/>
                             </a:rPr>
-                            <m:t>𝑖</m:t>
+                            <m:t>𝑗</m:t>
                           </m:r>
                         </m:sub>
                       </m:sSub>
@@ -21046,7 +21073,7 @@
                               <a:latin typeface="Cambria Math" panose="02040503050406030204" pitchFamily="18" charset="0"/>
                               <a:ea typeface="Cambria Math" panose="02040503050406030204" pitchFamily="18" charset="0"/>
                             </a:rPr>
-                            <m:t>𝑗</m:t>
+                            <m:t>𝑖</m:t>
                           </m:r>
                         </m:sub>
                       </m:sSub>
@@ -21081,7 +21108,7 @@
                               <a:latin typeface="Cambria Math" panose="02040503050406030204" pitchFamily="18" charset="0"/>
                               <a:ea typeface="Cambria Math" panose="02040503050406030204" pitchFamily="18" charset="0"/>
                             </a:rPr>
-                            <m:t>𝑖</m:t>
+                            <m:t>𝑗</m:t>
                           </m:r>
                         </m:sub>
                       </m:sSub>
@@ -21116,7 +21143,7 @@
                               <a:latin typeface="Cambria Math" panose="02040503050406030204" pitchFamily="18" charset="0"/>
                               <a:ea typeface="Cambria Math" panose="02040503050406030204" pitchFamily="18" charset="0"/>
                             </a:rPr>
-                            <m:t>𝑗</m:t>
+                            <m:t>𝑖</m:t>
                           </m:r>
                         </m:sub>
                       </m:sSub>
@@ -21926,7 +21953,7 @@
                 </a:pPr>
                 <a:r>
                   <a:rPr lang="en-GB" dirty="0"/>
-                  <a:t>Hence there will be a increasing sequence of for </a:t>
+                  <a:t>Hence there will be an increasing sequence of </a:t>
                 </a:r>
                 <a14:m>
                   <m:oMath xmlns:m="http://schemas.openxmlformats.org/officeDocument/2006/math">
